--- a/20243/Part 2-Regression/1-1-simple linear regression.pptx
+++ b/20243/Part 2-Regression/1-1-simple linear regression.pptx
@@ -17,9 +17,9 @@
     <p:sldId id="484" r:id="rId14"/>
     <p:sldId id="481" r:id="rId15"/>
     <p:sldId id="461" r:id="rId16"/>
-    <p:sldId id="482" r:id="rId17"/>
-    <p:sldId id="483" r:id="rId18"/>
-    <p:sldId id="462" r:id="rId19"/>
+    <p:sldId id="462" r:id="rId17"/>
+    <p:sldId id="482" r:id="rId18"/>
+    <p:sldId id="483" r:id="rId19"/>
     <p:sldId id="463" r:id="rId20"/>
     <p:sldId id="465" r:id="rId21"/>
     <p:sldId id="464" r:id="rId22"/>
@@ -136,6 +136,7 @@
 <p1510:revInfo xmlns:a="http://schemas.openxmlformats.org/drawingml/2006/main" xmlns:r="http://schemas.openxmlformats.org/officeDocument/2006/relationships" xmlns:p1510="http://schemas.microsoft.com/office/powerpoint/2015/10/main">
   <p1510:revLst>
     <p1510:client id="{161A7FAA-B398-4429-9FC2-656B0895AF0F}" v="51" dt="2025-07-16T08:30:59.062"/>
+    <p1510:client id="{F585A28F-34F7-4D28-B641-78252DAB29E0}" v="1" dt="2025-07-16T09:16:07.771"/>
   </p1510:revLst>
 </p1510:revInfo>
 </file>
@@ -756,6 +757,152 @@
           </pc:sldLayoutMkLst>
         </pc:sldLayoutChg>
       </pc:sldMasterChg>
+    </pc:docChg>
+  </pc:docChgLst>
+  <pc:docChgLst>
+    <pc:chgData name="Mohammed Fasha" userId="cc64f42d-a1a6-4f08-b97b-0c37f877119f" providerId="ADAL" clId="{F585A28F-34F7-4D28-B641-78252DAB29E0}"/>
+    <pc:docChg chg="undo custSel modSld sldOrd">
+      <pc:chgData name="Mohammed Fasha" userId="cc64f42d-a1a6-4f08-b97b-0c37f877119f" providerId="ADAL" clId="{F585A28F-34F7-4D28-B641-78252DAB29E0}" dt="2025-07-16T09:17:57.509" v="81" actId="114"/>
+      <pc:docMkLst>
+        <pc:docMk/>
+      </pc:docMkLst>
+      <pc:sldChg chg="modSp mod">
+        <pc:chgData name="Mohammed Fasha" userId="cc64f42d-a1a6-4f08-b97b-0c37f877119f" providerId="ADAL" clId="{F585A28F-34F7-4D28-B641-78252DAB29E0}" dt="2025-07-16T09:14:06.583" v="24" actId="27636"/>
+        <pc:sldMkLst>
+          <pc:docMk/>
+          <pc:sldMk cId="1162554463" sldId="257"/>
+        </pc:sldMkLst>
+        <pc:spChg chg="mod">
+          <ac:chgData name="Mohammed Fasha" userId="cc64f42d-a1a6-4f08-b97b-0c37f877119f" providerId="ADAL" clId="{F585A28F-34F7-4D28-B641-78252DAB29E0}" dt="2025-07-16T09:14:06.583" v="24" actId="27636"/>
+          <ac:spMkLst>
+            <pc:docMk/>
+            <pc:sldMk cId="1162554463" sldId="257"/>
+            <ac:spMk id="3" creationId="{1A647627-019E-4599-BFE9-83A7DEA04B6D}"/>
+          </ac:spMkLst>
+        </pc:spChg>
+        <pc:spChg chg="mod">
+          <ac:chgData name="Mohammed Fasha" userId="cc64f42d-a1a6-4f08-b97b-0c37f877119f" providerId="ADAL" clId="{F585A28F-34F7-4D28-B641-78252DAB29E0}" dt="2025-07-16T09:14:03.934" v="22" actId="403"/>
+          <ac:spMkLst>
+            <pc:docMk/>
+            <pc:sldMk cId="1162554463" sldId="257"/>
+            <ac:spMk id="4" creationId="{929A5FA8-1320-61F3-BC79-488C9BA93D9F}"/>
+          </ac:spMkLst>
+        </pc:spChg>
+      </pc:sldChg>
+      <pc:sldChg chg="modSp mod">
+        <pc:chgData name="Mohammed Fasha" userId="cc64f42d-a1a6-4f08-b97b-0c37f877119f" providerId="ADAL" clId="{F585A28F-34F7-4D28-B641-78252DAB29E0}" dt="2025-07-16T09:14:22.611" v="25" actId="20577"/>
+        <pc:sldMkLst>
+          <pc:docMk/>
+          <pc:sldMk cId="2881282849" sldId="459"/>
+        </pc:sldMkLst>
+        <pc:spChg chg="mod">
+          <ac:chgData name="Mohammed Fasha" userId="cc64f42d-a1a6-4f08-b97b-0c37f877119f" providerId="ADAL" clId="{F585A28F-34F7-4D28-B641-78252DAB29E0}" dt="2025-07-16T09:14:22.611" v="25" actId="20577"/>
+          <ac:spMkLst>
+            <pc:docMk/>
+            <pc:sldMk cId="2881282849" sldId="459"/>
+            <ac:spMk id="10" creationId="{997C4077-274B-FAF4-67DA-B0DEA55B5FEA}"/>
+          </ac:spMkLst>
+        </pc:spChg>
+      </pc:sldChg>
+      <pc:sldChg chg="modSp mod ord">
+        <pc:chgData name="Mohammed Fasha" userId="cc64f42d-a1a6-4f08-b97b-0c37f877119f" providerId="ADAL" clId="{F585A28F-34F7-4D28-B641-78252DAB29E0}" dt="2025-07-16T09:17:57.509" v="81" actId="114"/>
+        <pc:sldMkLst>
+          <pc:docMk/>
+          <pc:sldMk cId="1427723282" sldId="462"/>
+        </pc:sldMkLst>
+        <pc:spChg chg="mod">
+          <ac:chgData name="Mohammed Fasha" userId="cc64f42d-a1a6-4f08-b97b-0c37f877119f" providerId="ADAL" clId="{F585A28F-34F7-4D28-B641-78252DAB29E0}" dt="2025-07-16T09:17:57.509" v="81" actId="114"/>
+          <ac:spMkLst>
+            <pc:docMk/>
+            <pc:sldMk cId="1427723282" sldId="462"/>
+            <ac:spMk id="2" creationId="{5161A592-C95D-5F4C-D812-FDE1F8B67D98}"/>
+          </ac:spMkLst>
+        </pc:spChg>
+      </pc:sldChg>
+      <pc:sldChg chg="modSp mod">
+        <pc:chgData name="Mohammed Fasha" userId="cc64f42d-a1a6-4f08-b97b-0c37f877119f" providerId="ADAL" clId="{F585A28F-34F7-4D28-B641-78252DAB29E0}" dt="2025-07-16T09:12:22.563" v="0" actId="404"/>
+        <pc:sldMkLst>
+          <pc:docMk/>
+          <pc:sldMk cId="2145969539" sldId="478"/>
+        </pc:sldMkLst>
+        <pc:spChg chg="mod">
+          <ac:chgData name="Mohammed Fasha" userId="cc64f42d-a1a6-4f08-b97b-0c37f877119f" providerId="ADAL" clId="{F585A28F-34F7-4D28-B641-78252DAB29E0}" dt="2025-07-16T09:12:22.563" v="0" actId="404"/>
+          <ac:spMkLst>
+            <pc:docMk/>
+            <pc:sldMk cId="2145969539" sldId="478"/>
+            <ac:spMk id="2" creationId="{595313C8-76FF-2F07-3ED5-814AD3EC72DC}"/>
+          </ac:spMkLst>
+        </pc:spChg>
+      </pc:sldChg>
+      <pc:sldChg chg="modSp mod">
+        <pc:chgData name="Mohammed Fasha" userId="cc64f42d-a1a6-4f08-b97b-0c37f877119f" providerId="ADAL" clId="{F585A28F-34F7-4D28-B641-78252DAB29E0}" dt="2025-07-16T09:14:47.069" v="29" actId="255"/>
+        <pc:sldMkLst>
+          <pc:docMk/>
+          <pc:sldMk cId="1427132372" sldId="479"/>
+        </pc:sldMkLst>
+        <pc:spChg chg="mod">
+          <ac:chgData name="Mohammed Fasha" userId="cc64f42d-a1a6-4f08-b97b-0c37f877119f" providerId="ADAL" clId="{F585A28F-34F7-4D28-B641-78252DAB29E0}" dt="2025-07-16T09:14:47.069" v="29" actId="255"/>
+          <ac:spMkLst>
+            <pc:docMk/>
+            <pc:sldMk cId="1427132372" sldId="479"/>
+            <ac:spMk id="2" creationId="{E56CB444-3023-BA2B-502A-E63C438605D8}"/>
+          </ac:spMkLst>
+        </pc:spChg>
+      </pc:sldChg>
+      <pc:sldChg chg="modSp mod">
+        <pc:chgData name="Mohammed Fasha" userId="cc64f42d-a1a6-4f08-b97b-0c37f877119f" providerId="ADAL" clId="{F585A28F-34F7-4D28-B641-78252DAB29E0}" dt="2025-07-16T09:16:07.771" v="68" actId="1076"/>
+        <pc:sldMkLst>
+          <pc:docMk/>
+          <pc:sldMk cId="3075052158" sldId="480"/>
+        </pc:sldMkLst>
+        <pc:spChg chg="mod">
+          <ac:chgData name="Mohammed Fasha" userId="cc64f42d-a1a6-4f08-b97b-0c37f877119f" providerId="ADAL" clId="{F585A28F-34F7-4D28-B641-78252DAB29E0}" dt="2025-07-16T09:16:02.732" v="67" actId="179"/>
+          <ac:spMkLst>
+            <pc:docMk/>
+            <pc:sldMk cId="3075052158" sldId="480"/>
+            <ac:spMk id="2" creationId="{D7723A21-97D0-9266-6B42-28CBEDC236D9}"/>
+          </ac:spMkLst>
+        </pc:spChg>
+        <pc:picChg chg="mod">
+          <ac:chgData name="Mohammed Fasha" userId="cc64f42d-a1a6-4f08-b97b-0c37f877119f" providerId="ADAL" clId="{F585A28F-34F7-4D28-B641-78252DAB29E0}" dt="2025-07-16T09:16:07.771" v="68" actId="1076"/>
+          <ac:picMkLst>
+            <pc:docMk/>
+            <pc:sldMk cId="3075052158" sldId="480"/>
+            <ac:picMk id="5123" creationId="{7227A453-5C80-EF05-DBFF-BB24669D733C}"/>
+          </ac:picMkLst>
+        </pc:picChg>
+      </pc:sldChg>
+      <pc:sldChg chg="modSp mod">
+        <pc:chgData name="Mohammed Fasha" userId="cc64f42d-a1a6-4f08-b97b-0c37f877119f" providerId="ADAL" clId="{F585A28F-34F7-4D28-B641-78252DAB29E0}" dt="2025-07-16T09:16:45.419" v="74" actId="1076"/>
+        <pc:sldMkLst>
+          <pc:docMk/>
+          <pc:sldMk cId="1949621639" sldId="484"/>
+        </pc:sldMkLst>
+        <pc:spChg chg="mod">
+          <ac:chgData name="Mohammed Fasha" userId="cc64f42d-a1a6-4f08-b97b-0c37f877119f" providerId="ADAL" clId="{F585A28F-34F7-4D28-B641-78252DAB29E0}" dt="2025-07-16T09:16:34.981" v="72" actId="5793"/>
+          <ac:spMkLst>
+            <pc:docMk/>
+            <pc:sldMk cId="1949621639" sldId="484"/>
+            <ac:spMk id="2" creationId="{00E50F6B-D0D0-409C-B437-2D7A32D8857A}"/>
+          </ac:spMkLst>
+        </pc:spChg>
+        <pc:picChg chg="mod">
+          <ac:chgData name="Mohammed Fasha" userId="cc64f42d-a1a6-4f08-b97b-0c37f877119f" providerId="ADAL" clId="{F585A28F-34F7-4D28-B641-78252DAB29E0}" dt="2025-07-16T09:16:42.296" v="73" actId="14100"/>
+          <ac:picMkLst>
+            <pc:docMk/>
+            <pc:sldMk cId="1949621639" sldId="484"/>
+            <ac:picMk id="12" creationId="{ED72E220-66E3-C895-AA2B-7821BAB0B80F}"/>
+          </ac:picMkLst>
+        </pc:picChg>
+        <pc:picChg chg="mod">
+          <ac:chgData name="Mohammed Fasha" userId="cc64f42d-a1a6-4f08-b97b-0c37f877119f" providerId="ADAL" clId="{F585A28F-34F7-4D28-B641-78252DAB29E0}" dt="2025-07-16T09:16:45.419" v="74" actId="1076"/>
+          <ac:picMkLst>
+            <pc:docMk/>
+            <pc:sldMk cId="1949621639" sldId="484"/>
+            <ac:picMk id="13" creationId="{923AB4FC-8803-B130-E7FF-D6F9B65D8759}"/>
+          </ac:picMkLst>
+        </pc:picChg>
+      </pc:sldChg>
     </pc:docChg>
   </pc:docChgLst>
   <pc:docChgLst>
@@ -4922,18 +5069,8 @@
               <a:buNone/>
             </a:pPr>
             <a:r>
-              <a:rPr lang="en-US" b="1" dirty="0"/>
+              <a:rPr lang="en-US" sz="2400" b="1" dirty="0"/>
               <a:t>The Foundation of Linear Regression</a:t>
-            </a:r>
-          </a:p>
-          <a:p>
-            <a:r>
-              <a:rPr lang="en-US" b="1" dirty="0"/>
-              <a:t>OLS Principle:</a:t>
-            </a:r>
-            <a:r>
-              <a:rPr lang="en-US" dirty="0"/>
-              <a:t> Find the line that minimizes the sum of squared differences between observed and predicted values.</a:t>
             </a:r>
           </a:p>
           <a:p>
@@ -4941,31 +5078,44 @@
               <a:buNone/>
             </a:pPr>
             <a:r>
-              <a:rPr lang="en-US" b="1" dirty="0"/>
+              <a:rPr lang="en-US" sz="2400" b="1" dirty="0"/>
+              <a:t>OLS Principle:</a:t>
+            </a:r>
+            <a:r>
+              <a:rPr lang="en-US" sz="2400" dirty="0"/>
+              <a:t> Find the line that minimizes the sum of squared differences between observed and predicted values.</a:t>
+            </a:r>
+          </a:p>
+          <a:p>
+            <a:pPr marL="0" indent="0">
+              <a:buNone/>
+            </a:pPr>
+            <a:r>
+              <a:rPr lang="en-US" sz="2400" b="1" dirty="0"/>
               <a:t>Why "Least Squares"?</a:t>
             </a:r>
-            <a:endParaRPr lang="en-US" dirty="0"/>
-          </a:p>
-          <a:p>
-            <a:r>
-              <a:rPr lang="en-US" dirty="0"/>
+            <a:endParaRPr lang="en-US" sz="2400" dirty="0"/>
+          </a:p>
+          <a:p>
+            <a:r>
+              <a:rPr lang="en-US" sz="2400" dirty="0"/>
               <a:t>Squares prevent positive and negative errors from canceling out</a:t>
             </a:r>
           </a:p>
           <a:p>
             <a:r>
-              <a:rPr lang="en-US" dirty="0"/>
+              <a:rPr lang="en-US" sz="2400" dirty="0"/>
               <a:t>Penalizes larger errors more heavily</a:t>
             </a:r>
           </a:p>
           <a:p>
             <a:r>
-              <a:rPr lang="en-US" dirty="0"/>
+              <a:rPr lang="en-US" sz="2400" dirty="0"/>
               <a:t>Provides unique, mathematically optimal solution</a:t>
             </a:r>
           </a:p>
           <a:p>
-            <a:endParaRPr lang="en-US" dirty="0"/>
+            <a:endParaRPr lang="en-US" sz="2400" dirty="0"/>
           </a:p>
         </p:txBody>
       </p:sp>
@@ -5021,8 +5171,8 @@
         </p:blipFill>
         <p:spPr>
           <a:xfrm>
-            <a:off x="6741871" y="1633491"/>
-            <a:ext cx="4972665" cy="3910622"/>
+            <a:off x="7066659" y="1633491"/>
+            <a:ext cx="4647877" cy="3655201"/>
           </a:xfrm>
           <a:prstGeom prst="rect">
             <a:avLst/>
@@ -5051,7 +5201,7 @@
         </p:blipFill>
         <p:spPr>
           <a:xfrm>
-            <a:off x="8282966" y="5489997"/>
+            <a:off x="8406533" y="5524043"/>
             <a:ext cx="2349975" cy="1333957"/>
           </a:xfrm>
           <a:prstGeom prst="rect">
@@ -5920,7 +6070,13 @@
   <p:cSld>
     <p:spTree>
       <p:nvGrpSpPr>
-        <p:cNvPr id="1" name=""/>
+        <p:cNvPr id="1" name="">
+          <a:extLst>
+            <a:ext uri="{FF2B5EF4-FFF2-40B4-BE49-F238E27FC236}">
+              <a16:creationId xmlns:a16="http://schemas.microsoft.com/office/drawing/2014/main" id="{A13DFCA9-DB68-4926-D36D-44E2CB4365C6}"/>
+            </a:ext>
+          </a:extLst>
+        </p:cNvPr>
         <p:cNvGrpSpPr/>
         <p:nvPr/>
       </p:nvGrpSpPr>
@@ -5937,7 +6093,7 @@
           <p:cNvPr id="2" name="Content Placeholder 1">
             <a:extLst>
               <a:ext uri="{FF2B5EF4-FFF2-40B4-BE49-F238E27FC236}">
-                <a16:creationId xmlns:a16="http://schemas.microsoft.com/office/drawing/2014/main" id="{4AB508A7-8888-D77B-B430-86487FE1DB28}"/>
+                <a16:creationId xmlns:a16="http://schemas.microsoft.com/office/drawing/2014/main" id="{5161A592-C95D-5F4C-D812-FDE1F8B67D98}"/>
               </a:ext>
             </a:extLst>
           </p:cNvPr>
@@ -5948,44 +6104,157 @@
             <p:ph idx="1"/>
           </p:nvPr>
         </p:nvSpPr>
+        <p:spPr>
+          <a:xfrm>
+            <a:off x="838199" y="1633491"/>
+            <a:ext cx="6123039" cy="5131294"/>
+          </a:xfrm>
+        </p:spPr>
+        <p:txBody>
+          <a:bodyPr>
+            <a:normAutofit fontScale="85000" lnSpcReduction="10000"/>
+          </a:bodyPr>
+          <a:lstStyle/>
+          <a:p>
+            <a:r>
+              <a:rPr lang="en-US" dirty="0"/>
+              <a:t>A linear regression model can be trained using </a:t>
+            </a:r>
+            <a:r>
+              <a:rPr lang="en-US" b="1" i="1" dirty="0"/>
+              <a:t>Gradient Descent</a:t>
+            </a:r>
+            <a:r>
+              <a:rPr lang="en-US" dirty="0"/>
+              <a:t>, which adjusts the model's parameters to minimize the mean squared error (MSE).</a:t>
+            </a:r>
+          </a:p>
+          <a:p>
+            <a:r>
+              <a:rPr lang="en-US" dirty="0"/>
+              <a:t>To update (</a:t>
+            </a:r>
+            <a:r>
+              <a:rPr lang="en-US" i="1" dirty="0"/>
+              <a:t>Beta 0) </a:t>
+            </a:r>
+            <a:r>
+              <a:rPr lang="en-US" dirty="0"/>
+              <a:t>and (</a:t>
+            </a:r>
+            <a:r>
+              <a:rPr lang="en-US" i="1" dirty="0"/>
+              <a:t>Beta 1)</a:t>
+            </a:r>
+            <a:r>
+              <a:rPr lang="en-US" dirty="0"/>
+              <a:t> and reduce the cost function (minimizing the RMSE), gradient descent starts with random values for (</a:t>
+            </a:r>
+            <a:r>
+              <a:rPr lang="en-US" i="1" dirty="0"/>
+              <a:t>Beta 0) </a:t>
+            </a:r>
+            <a:r>
+              <a:rPr lang="en-US" dirty="0"/>
+              <a:t>and (</a:t>
+            </a:r>
+            <a:r>
+              <a:rPr lang="en-US" i="1" dirty="0"/>
+              <a:t>Beta 1) </a:t>
+            </a:r>
+            <a:r>
+              <a:rPr lang="en-US" dirty="0"/>
+              <a:t>and </a:t>
+            </a:r>
+            <a:r>
+              <a:rPr lang="en-US" b="1" i="1" dirty="0">
+                <a:solidFill>
+                  <a:srgbClr val="FF0000"/>
+                </a:solidFill>
+              </a:rPr>
+              <a:t>iteratively</a:t>
+            </a:r>
+            <a:r>
+              <a:rPr lang="en-US" dirty="0"/>
+              <a:t> improves them to find the best-fit line.</a:t>
+            </a:r>
+          </a:p>
+          <a:p>
+            <a:r>
+              <a:rPr lang="en-US" dirty="0"/>
+              <a:t>A gradient is simply the derivative, showing how small changes in inputs affect the output. </a:t>
+            </a:r>
+          </a:p>
+          <a:p>
+            <a:r>
+              <a:rPr lang="en-US" dirty="0"/>
+              <a:t>By moving in the direction of the Mean Squared Error negative gradient with respect to the coefficients, the coefficients can be changed.</a:t>
+            </a:r>
+          </a:p>
+        </p:txBody>
+      </p:sp>
+      <p:sp>
+        <p:nvSpPr>
+          <p:cNvPr id="3" name="Title 2">
+            <a:extLst>
+              <a:ext uri="{FF2B5EF4-FFF2-40B4-BE49-F238E27FC236}">
+                <a16:creationId xmlns:a16="http://schemas.microsoft.com/office/drawing/2014/main" id="{DF98230F-D09E-0053-052C-DBBDA534D6A9}"/>
+              </a:ext>
+            </a:extLst>
+          </p:cNvPr>
+          <p:cNvSpPr>
+            <a:spLocks noGrp="1"/>
+          </p:cNvSpPr>
+          <p:nvPr>
+            <p:ph type="title"/>
+          </p:nvPr>
+        </p:nvSpPr>
         <p:spPr/>
         <p:txBody>
           <a:bodyPr/>
           <a:lstStyle/>
           <a:p>
-            <a:endParaRPr lang="en-US"/>
-          </a:p>
-        </p:txBody>
-      </p:sp>
-      <p:sp>
-        <p:nvSpPr>
-          <p:cNvPr id="3" name="Title 2">
-            <a:extLst>
-              <a:ext uri="{FF2B5EF4-FFF2-40B4-BE49-F238E27FC236}">
-                <a16:creationId xmlns:a16="http://schemas.microsoft.com/office/drawing/2014/main" id="{28A4CF1C-C04B-6B0E-66D9-A9DDA7F6AA70}"/>
-              </a:ext>
-            </a:extLst>
-          </p:cNvPr>
-          <p:cNvSpPr>
-            <a:spLocks noGrp="1"/>
-          </p:cNvSpPr>
-          <p:nvPr>
-            <p:ph type="title"/>
-          </p:nvPr>
-        </p:nvSpPr>
-        <p:spPr/>
-        <p:txBody>
-          <a:bodyPr/>
-          <a:lstStyle/>
-          <a:p>
-            <a:endParaRPr lang="en-US"/>
-          </a:p>
-        </p:txBody>
-      </p:sp>
+            <a:r>
+              <a:rPr lang="en-US" dirty="0"/>
+              <a:t>Solving Linear Regression Using The Gradient Descent Method</a:t>
+            </a:r>
+          </a:p>
+        </p:txBody>
+      </p:sp>
+      <p:pic>
+        <p:nvPicPr>
+          <p:cNvPr id="5" name="Picture 4">
+            <a:extLst>
+              <a:ext uri="{FF2B5EF4-FFF2-40B4-BE49-F238E27FC236}">
+                <a16:creationId xmlns:a16="http://schemas.microsoft.com/office/drawing/2014/main" id="{2C0B6C6C-BCCC-176F-E3E9-9C6155B90FC2}"/>
+              </a:ext>
+            </a:extLst>
+          </p:cNvPr>
+          <p:cNvPicPr>
+            <a:picLocks noChangeAspect="1"/>
+          </p:cNvPicPr>
+          <p:nvPr/>
+        </p:nvPicPr>
+        <p:blipFill>
+          <a:blip r:embed="rId2"/>
+          <a:stretch>
+            <a:fillRect/>
+          </a:stretch>
+        </p:blipFill>
+        <p:spPr>
+          <a:xfrm>
+            <a:off x="7231423" y="1746681"/>
+            <a:ext cx="4122377" cy="2996518"/>
+          </a:xfrm>
+          <a:prstGeom prst="rect">
+            <a:avLst/>
+          </a:prstGeom>
+        </p:spPr>
+      </p:pic>
     </p:spTree>
     <p:extLst>
       <p:ext uri="{BB962C8B-B14F-4D97-AF65-F5344CB8AC3E}">
-        <p14:creationId xmlns:p14="http://schemas.microsoft.com/office/powerpoint/2010/main" val="3941017664"/>
+        <p14:creationId xmlns:p14="http://schemas.microsoft.com/office/powerpoint/2010/main" val="1427723282"/>
       </p:ext>
     </p:extLst>
   </p:cSld>
@@ -6017,7 +6286,7 @@
           <p:cNvPr id="2" name="Content Placeholder 1">
             <a:extLst>
               <a:ext uri="{FF2B5EF4-FFF2-40B4-BE49-F238E27FC236}">
-                <a16:creationId xmlns:a16="http://schemas.microsoft.com/office/drawing/2014/main" id="{269DA4D1-C52F-51DE-82E4-4CE2A0A5B4F9}"/>
+                <a16:creationId xmlns:a16="http://schemas.microsoft.com/office/drawing/2014/main" id="{4AB508A7-8888-D77B-B430-86487FE1DB28}"/>
               </a:ext>
             </a:extLst>
           </p:cNvPr>
@@ -6042,7 +6311,7 @@
           <p:cNvPr id="3" name="Title 2">
             <a:extLst>
               <a:ext uri="{FF2B5EF4-FFF2-40B4-BE49-F238E27FC236}">
-                <a16:creationId xmlns:a16="http://schemas.microsoft.com/office/drawing/2014/main" id="{313D3DFB-4B7B-5020-971F-AF2B7A0A35FA}"/>
+                <a16:creationId xmlns:a16="http://schemas.microsoft.com/office/drawing/2014/main" id="{28A4CF1C-C04B-6B0E-66D9-A9DDA7F6AA70}"/>
               </a:ext>
             </a:extLst>
           </p:cNvPr>
@@ -6065,7 +6334,7 @@
     </p:spTree>
     <p:extLst>
       <p:ext uri="{BB962C8B-B14F-4D97-AF65-F5344CB8AC3E}">
-        <p14:creationId xmlns:p14="http://schemas.microsoft.com/office/powerpoint/2010/main" val="1291192180"/>
+        <p14:creationId xmlns:p14="http://schemas.microsoft.com/office/powerpoint/2010/main" val="3941017664"/>
       </p:ext>
     </p:extLst>
   </p:cSld>
@@ -6080,13 +6349,7 @@
   <p:cSld>
     <p:spTree>
       <p:nvGrpSpPr>
-        <p:cNvPr id="1" name="">
-          <a:extLst>
-            <a:ext uri="{FF2B5EF4-FFF2-40B4-BE49-F238E27FC236}">
-              <a16:creationId xmlns:a16="http://schemas.microsoft.com/office/drawing/2014/main" id="{A13DFCA9-DB68-4926-D36D-44E2CB4365C6}"/>
-            </a:ext>
-          </a:extLst>
-        </p:cNvPr>
+        <p:cNvPr id="1" name=""/>
         <p:cNvGrpSpPr/>
         <p:nvPr/>
       </p:nvGrpSpPr>
@@ -6103,7 +6366,7 @@
           <p:cNvPr id="2" name="Content Placeholder 1">
             <a:extLst>
               <a:ext uri="{FF2B5EF4-FFF2-40B4-BE49-F238E27FC236}">
-                <a16:creationId xmlns:a16="http://schemas.microsoft.com/office/drawing/2014/main" id="{5161A592-C95D-5F4C-D812-FDE1F8B67D98}"/>
+                <a16:creationId xmlns:a16="http://schemas.microsoft.com/office/drawing/2014/main" id="{269DA4D1-C52F-51DE-82E4-4CE2A0A5B4F9}"/>
               </a:ext>
             </a:extLst>
           </p:cNvPr>
@@ -6114,72 +6377,12 @@
             <p:ph idx="1"/>
           </p:nvPr>
         </p:nvSpPr>
-        <p:spPr>
-          <a:xfrm>
-            <a:off x="838199" y="1633491"/>
-            <a:ext cx="6123039" cy="5131294"/>
-          </a:xfrm>
-        </p:spPr>
-        <p:txBody>
-          <a:bodyPr>
-            <a:normAutofit fontScale="85000" lnSpcReduction="10000"/>
-          </a:bodyPr>
+        <p:spPr/>
+        <p:txBody>
+          <a:bodyPr/>
           <a:lstStyle/>
           <a:p>
-            <a:r>
-              <a:rPr lang="en-US" dirty="0"/>
-              <a:t>A linear regression model can be trained using Gradient Descent, which adjusts the model's parameters to minimize the mean squared error (MSE).</a:t>
-            </a:r>
-          </a:p>
-          <a:p>
-            <a:r>
-              <a:rPr lang="en-US" dirty="0"/>
-              <a:t>To update (</a:t>
-            </a:r>
-            <a:r>
-              <a:rPr lang="en-US" i="1" dirty="0"/>
-              <a:t>Beta 0) </a:t>
-            </a:r>
-            <a:r>
-              <a:rPr lang="en-US" dirty="0"/>
-              <a:t>and (</a:t>
-            </a:r>
-            <a:r>
-              <a:rPr lang="en-US" i="1" dirty="0"/>
-              <a:t>Beta 1)</a:t>
-            </a:r>
-            <a:r>
-              <a:rPr lang="en-US" dirty="0"/>
-              <a:t> and reduce the cost function (minimizing the RMSE), gradient descent starts with random values for (</a:t>
-            </a:r>
-            <a:r>
-              <a:rPr lang="en-US" i="1" dirty="0"/>
-              <a:t>Beta 0) </a:t>
-            </a:r>
-            <a:r>
-              <a:rPr lang="en-US" dirty="0"/>
-              <a:t>and (</a:t>
-            </a:r>
-            <a:r>
-              <a:rPr lang="en-US" i="1" dirty="0"/>
-              <a:t>Beta 1) </a:t>
-            </a:r>
-            <a:r>
-              <a:rPr lang="en-US" dirty="0"/>
-              <a:t>and iteratively improves them to find the best-fit line.</a:t>
-            </a:r>
-          </a:p>
-          <a:p>
-            <a:r>
-              <a:rPr lang="en-US" dirty="0"/>
-              <a:t>A gradient is simply the derivative, showing how small changes in inputs affect the output. </a:t>
-            </a:r>
-          </a:p>
-          <a:p>
-            <a:r>
-              <a:rPr lang="en-US" dirty="0"/>
-              <a:t>By moving in the direction of the Mean Squared Error negative gradient with respect to the coefficients, the coefficients can be changed.</a:t>
-            </a:r>
+            <a:endParaRPr lang="en-US"/>
           </a:p>
         </p:txBody>
       </p:sp>
@@ -6188,7 +6391,7 @@
           <p:cNvPr id="3" name="Title 2">
             <a:extLst>
               <a:ext uri="{FF2B5EF4-FFF2-40B4-BE49-F238E27FC236}">
-                <a16:creationId xmlns:a16="http://schemas.microsoft.com/office/drawing/2014/main" id="{DF98230F-D09E-0053-052C-DBBDA534D6A9}"/>
+                <a16:creationId xmlns:a16="http://schemas.microsoft.com/office/drawing/2014/main" id="{313D3DFB-4B7B-5020-971F-AF2B7A0A35FA}"/>
               </a:ext>
             </a:extLst>
           </p:cNvPr>
@@ -6204,47 +6407,14 @@
           <a:bodyPr/>
           <a:lstStyle/>
           <a:p>
-            <a:r>
-              <a:rPr lang="en-US" dirty="0"/>
-              <a:t>Solving Linear Regression Using The Gradient Descent Method</a:t>
-            </a:r>
-          </a:p>
-        </p:txBody>
-      </p:sp>
-      <p:pic>
-        <p:nvPicPr>
-          <p:cNvPr id="5" name="Picture 4">
-            <a:extLst>
-              <a:ext uri="{FF2B5EF4-FFF2-40B4-BE49-F238E27FC236}">
-                <a16:creationId xmlns:a16="http://schemas.microsoft.com/office/drawing/2014/main" id="{2C0B6C6C-BCCC-176F-E3E9-9C6155B90FC2}"/>
-              </a:ext>
-            </a:extLst>
-          </p:cNvPr>
-          <p:cNvPicPr>
-            <a:picLocks noChangeAspect="1"/>
-          </p:cNvPicPr>
-          <p:nvPr/>
-        </p:nvPicPr>
-        <p:blipFill>
-          <a:blip r:embed="rId2"/>
-          <a:stretch>
-            <a:fillRect/>
-          </a:stretch>
-        </p:blipFill>
-        <p:spPr>
-          <a:xfrm>
-            <a:off x="7231423" y="1746681"/>
-            <a:ext cx="4122377" cy="2996518"/>
-          </a:xfrm>
-          <a:prstGeom prst="rect">
-            <a:avLst/>
-          </a:prstGeom>
-        </p:spPr>
-      </p:pic>
+            <a:endParaRPr lang="en-US"/>
+          </a:p>
+        </p:txBody>
+      </p:sp>
     </p:spTree>
     <p:extLst>
       <p:ext uri="{BB962C8B-B14F-4D97-AF65-F5344CB8AC3E}">
-        <p14:creationId xmlns:p14="http://schemas.microsoft.com/office/powerpoint/2010/main" val="1427723282"/>
+        <p14:creationId xmlns:p14="http://schemas.microsoft.com/office/powerpoint/2010/main" val="1291192180"/>
       </p:ext>
     </p:extLst>
   </p:cSld>
@@ -6945,73 +7115,75 @@
         </p:nvSpPr>
         <p:spPr/>
         <p:txBody>
-          <a:bodyPr/>
+          <a:bodyPr>
+            <a:normAutofit/>
+          </a:bodyPr>
           <a:lstStyle/>
           <a:p>
             <a:pPr marL="0" indent="0">
               <a:buNone/>
             </a:pPr>
             <a:r>
-              <a:rPr lang="en-US" dirty="0"/>
+              <a:rPr lang="en-US" sz="2400" dirty="0"/>
               <a:t>What You'll Learn:</a:t>
             </a:r>
           </a:p>
           <a:p>
             <a:r>
-              <a:rPr lang="en-US" dirty="0"/>
+              <a:rPr lang="en-US" sz="2400" dirty="0"/>
               <a:t>Introduce the concept of supervised learning</a:t>
             </a:r>
           </a:p>
           <a:p>
             <a:r>
-              <a:rPr lang="en-US" dirty="0"/>
+              <a:rPr lang="en-US" sz="2400" dirty="0"/>
               <a:t>Understanding regression analysis fundamentals</a:t>
             </a:r>
           </a:p>
           <a:p>
             <a:r>
-              <a:rPr lang="en-US" dirty="0"/>
+              <a:rPr lang="en-US" sz="2400" dirty="0"/>
               <a:t>Types of linear regression models</a:t>
             </a:r>
           </a:p>
           <a:p>
             <a:r>
-              <a:rPr lang="en-US" dirty="0"/>
+              <a:rPr lang="en-US" sz="2400" dirty="0"/>
               <a:t>Best-fit line, hypothesis function, and OLS method</a:t>
             </a:r>
           </a:p>
           <a:p>
             <a:r>
-              <a:rPr lang="en-US" dirty="0"/>
+              <a:rPr lang="en-US" sz="2400" dirty="0"/>
               <a:t>Closed-form solution implementation</a:t>
             </a:r>
           </a:p>
           <a:p>
             <a:r>
-              <a:rPr lang="en-US" dirty="0"/>
+              <a:rPr lang="en-US" sz="2400" dirty="0"/>
               <a:t>Gradient descent algorithm</a:t>
             </a:r>
           </a:p>
           <a:p>
             <a:r>
-              <a:rPr lang="en-US" dirty="0"/>
+              <a:rPr lang="en-US" sz="2400" dirty="0"/>
               <a:t>Linear regression assumptions</a:t>
             </a:r>
           </a:p>
           <a:p>
             <a:r>
-              <a:rPr lang="en-US" dirty="0"/>
+              <a:rPr lang="en-US" sz="2400" dirty="0"/>
               <a:t>Evaluation metrics and performance assessment</a:t>
             </a:r>
           </a:p>
           <a:p>
             <a:r>
-              <a:rPr lang="en-US" dirty="0"/>
+              <a:rPr lang="en-US" sz="2400" dirty="0"/>
               <a:t>Practical implementation with scikit-learn</a:t>
             </a:r>
           </a:p>
           <a:p>
-            <a:endParaRPr lang="en-US" dirty="0"/>
+            <a:endParaRPr lang="en-US" sz="2400" dirty="0"/>
           </a:p>
         </p:txBody>
       </p:sp>
@@ -7409,7 +7581,7 @@
         </p:spPr>
         <p:txBody>
           <a:bodyPr>
-            <a:normAutofit fontScale="70000" lnSpcReduction="20000"/>
+            <a:normAutofit fontScale="92500" lnSpcReduction="20000"/>
           </a:bodyPr>
           <a:lstStyle/>
           <a:p>
@@ -7417,26 +7589,47 @@
               <a:buNone/>
             </a:pPr>
             <a:r>
-              <a:rPr lang="en-US" dirty="0"/>
-              <a:t>Supervised machine learning is a type of learning where a model learns from labeled data. The process follows these key steps:</a:t>
-            </a:r>
-          </a:p>
-          <a:p>
-            <a:r>
-              <a:rPr lang="en-US" dirty="0"/>
-              <a:t>Input Features (X): The model takes input data (features) which represents the information used to make predictions.</a:t>
-            </a:r>
-          </a:p>
-          <a:p>
-            <a:r>
-              <a:rPr lang="en-US" dirty="0"/>
-              <a:t>Prediction Function: The model, with some parameters (θ), processes the input data to generate predictions (Ŷ).</a:t>
-            </a:r>
-          </a:p>
-          <a:p>
-            <a:r>
-              <a:rPr lang="en-US" dirty="0"/>
-              <a:t>Output (Ŷ): This is the model’s prediction based on the input features.</a:t>
+              <a:rPr lang="en-US" sz="2000" dirty="0"/>
+              <a:t>Supervised machine learning is a type of learning where a model learns from labeled data. </a:t>
+            </a:r>
+          </a:p>
+          <a:p>
+            <a:pPr marL="0" indent="0">
+              <a:buNone/>
+            </a:pPr>
+            <a:r>
+              <a:rPr lang="en-US" sz="2000" dirty="0"/>
+              <a:t>The process follows these key steps:</a:t>
+            </a:r>
+          </a:p>
+          <a:p>
+            <a:r>
+              <a:rPr lang="en-US" sz="2000" b="1" dirty="0"/>
+              <a:t>Input Features (X): </a:t>
+            </a:r>
+            <a:r>
+              <a:rPr lang="en-US" sz="2000" dirty="0"/>
+              <a:t>The model takes input data (features) which represents the information used to make predictions.</a:t>
+            </a:r>
+          </a:p>
+          <a:p>
+            <a:r>
+              <a:rPr lang="en-US" sz="2000" b="1" dirty="0"/>
+              <a:t>Prediction Function: </a:t>
+            </a:r>
+            <a:r>
+              <a:rPr lang="en-US" sz="2000" dirty="0"/>
+              <a:t>The model, with some parameters (θ), processes the input data to generate predictions (Ŷ).</a:t>
+            </a:r>
+          </a:p>
+          <a:p>
+            <a:r>
+              <a:rPr lang="en-US" sz="2000" b="1" dirty="0"/>
+              <a:t>Output (Ŷ): </a:t>
+            </a:r>
+            <a:r>
+              <a:rPr lang="en-US" sz="2000" dirty="0"/>
+              <a:t>This is the model’s prediction based on the input features.</a:t>
             </a:r>
           </a:p>
         </p:txBody>
@@ -7515,7 +7708,7 @@
         </p:nvSpPr>
         <p:spPr>
           <a:xfrm>
-            <a:off x="838199" y="4693298"/>
+            <a:off x="838200" y="4730368"/>
             <a:ext cx="10515600" cy="2034073"/>
           </a:xfrm>
           <a:prstGeom prst="rect">
@@ -7524,7 +7717,7 @@
         </p:spPr>
         <p:txBody>
           <a:bodyPr vert="horz" lIns="91440" tIns="45720" rIns="91440" bIns="45720" rtlCol="0">
-            <a:normAutofit fontScale="70000" lnSpcReduction="20000"/>
+            <a:normAutofit/>
           </a:bodyPr>
           <a:lstStyle>
             <a:lvl1pPr marL="228600" indent="-228600" algn="l" defTabSz="914400" rtl="0" eaLnBrk="1" latinLnBrk="0" hangingPunct="1">
@@ -7692,25 +7885,38 @@
           </a:lstStyle>
           <a:p>
             <a:r>
-              <a:rPr lang="en-US" dirty="0"/>
-              <a:t>Cost Function: The predicted output (Ŷ) is compared to the actual labels (Y) to calculate an error or "cost."</a:t>
-            </a:r>
-          </a:p>
-          <a:p>
-            <a:r>
-              <a:rPr lang="en-US" dirty="0"/>
-              <a:t>Optimization: The model adjusts its parameters (θ) of the cost function to minimize the error, improving its predictions over time.</a:t>
-            </a:r>
-          </a:p>
-          <a:p>
-            <a:r>
-              <a:rPr lang="en-US" dirty="0"/>
+              <a:rPr lang="en-US" sz="2000" b="1" dirty="0"/>
+              <a:t>Cost Function: </a:t>
+            </a:r>
+            <a:r>
+              <a:rPr lang="en-US" sz="2000" dirty="0"/>
+              <a:t>The predicted output (Ŷ) is compared to the actual labels (Y) to calculate an error or "cost."</a:t>
+            </a:r>
+          </a:p>
+          <a:p>
+            <a:r>
+              <a:rPr lang="en-US" sz="2000" b="1" dirty="0"/>
+              <a:t>Optimization: </a:t>
+            </a:r>
+          </a:p>
+          <a:p>
+            <a:pPr lvl="1"/>
+            <a:r>
+              <a:rPr lang="en-US" sz="1600" dirty="0"/>
+              <a:t>The model adjusts its parameters (θ) of the cost function to minimize the error, improving its predictions over time.</a:t>
+            </a:r>
+          </a:p>
+          <a:p>
+            <a:pPr lvl="1"/>
+            <a:r>
+              <a:rPr lang="en-US" sz="1600" dirty="0"/>
               <a:t>This process repeats iteratively until the model achieves good accuracy. </a:t>
             </a:r>
           </a:p>
           <a:p>
-            <a:r>
-              <a:rPr lang="en-US" dirty="0"/>
+            <a:pPr lvl="1"/>
+            <a:r>
+              <a:rPr lang="en-US" sz="1600" dirty="0"/>
               <a:t>It's commonly used for tasks like classification (e.g., spam detection) and regression (e.g., predicting house prices).</a:t>
             </a:r>
           </a:p>
@@ -8673,7 +8879,13 @@
           <a:p>
             <a:r>
               <a:rPr lang="en-US" sz="2000" dirty="0"/>
-              <a:t>Linear regression predicts Y based on X, using a straight line to model the relationship. For example, X could be work experience, and Y could be salary. The goal is to find the best-fit line that minimizes the error between predicted and actual values.</a:t>
+              <a:t>Linear regression predicts Y based on X, using a straight line to model the relationship. For example, X could be work experience, and Y could be salary. </a:t>
+            </a:r>
+          </a:p>
+          <a:p>
+            <a:r>
+              <a:rPr lang="en-US" sz="2000" dirty="0"/>
+              <a:t>The goal is to find the best-fit line that minimizes the error between predicted and actual values.</a:t>
             </a:r>
           </a:p>
           <a:p>
@@ -8741,17 +8953,17 @@
               <a:buNone/>
             </a:pPr>
             <a:r>
-              <a:rPr lang="en-US" b="1" dirty="0"/>
+              <a:rPr lang="en-US" sz="2600" b="1" dirty="0"/>
               <a:t>Four Key Benefits:</a:t>
             </a:r>
           </a:p>
           <a:p>
             <a:r>
-              <a:rPr lang="en-US" b="1" dirty="0"/>
+              <a:rPr lang="en-US" sz="2600" b="1" dirty="0"/>
               <a:t>Interpretability</a:t>
             </a:r>
             <a:r>
-              <a:rPr lang="en-US" dirty="0"/>
+              <a:rPr lang="en-US" sz="2600" dirty="0"/>
               <a:t> </a:t>
             </a:r>
           </a:p>
@@ -8771,11 +8983,11 @@
           </a:p>
           <a:p>
             <a:r>
-              <a:rPr lang="en-US" b="1" dirty="0"/>
+              <a:rPr lang="en-US" sz="2600" b="1" dirty="0"/>
               <a:t>Simplicity</a:t>
             </a:r>
             <a:r>
-              <a:rPr lang="en-US" dirty="0"/>
+              <a:rPr lang="en-US" sz="2600" dirty="0"/>
               <a:t> </a:t>
             </a:r>
           </a:p>
@@ -8795,11 +9007,11 @@
           </a:p>
           <a:p>
             <a:r>
-              <a:rPr lang="en-US" b="1" dirty="0"/>
+              <a:rPr lang="en-US" sz="2600" b="1" dirty="0"/>
               <a:t>Basis for Advanced Models</a:t>
             </a:r>
             <a:r>
-              <a:rPr lang="en-US" dirty="0"/>
+              <a:rPr lang="en-US" sz="2600" dirty="0"/>
               <a:t> </a:t>
             </a:r>
           </a:p>
@@ -8819,11 +9031,11 @@
           </a:p>
           <a:p>
             <a:r>
-              <a:rPr lang="en-US" b="1" dirty="0"/>
+              <a:rPr lang="en-US" sz="2600" b="1" dirty="0"/>
               <a:t>Assumption Testing</a:t>
             </a:r>
             <a:r>
-              <a:rPr lang="en-US" dirty="0"/>
+              <a:rPr lang="en-US" sz="2600" dirty="0"/>
               <a:t> </a:t>
             </a:r>
           </a:p>
@@ -8961,15 +9173,25 @@
             </a:r>
           </a:p>
           <a:p>
-            <a:r>
-              <a:rPr lang="en-US" sz="2400" dirty="0"/>
-              <a:t>Slope (β₁): How much Y changes for each unit change in X</a:t>
-            </a:r>
-          </a:p>
-          <a:p>
-            <a:r>
-              <a:rPr lang="en-US" sz="2400" dirty="0"/>
-              <a:t>Intercept (β₀): Value of Y when X = 0</a:t>
+            <a:pPr marL="457200" lvl="1"/>
+            <a:r>
+              <a:rPr lang="en-US" sz="2200" b="1" dirty="0"/>
+              <a:t>Slope (β₁): </a:t>
+            </a:r>
+            <a:r>
+              <a:rPr lang="en-US" sz="2200" dirty="0"/>
+              <a:t>How much Y changes for each unit change in X</a:t>
+            </a:r>
+          </a:p>
+          <a:p>
+            <a:pPr marL="457200" lvl="1"/>
+            <a:r>
+              <a:rPr lang="en-US" sz="2200" b="1" dirty="0"/>
+              <a:t>Intercept (β₀): </a:t>
+            </a:r>
+            <a:r>
+              <a:rPr lang="en-US" sz="2200" dirty="0"/>
+              <a:t>Value of Y when X = 0</a:t>
             </a:r>
           </a:p>
           <a:p>
@@ -8981,19 +9203,16 @@
           <a:p>
             <a:r>
               <a:rPr lang="en-US" sz="2400" dirty="0"/>
-              <a:t>Mathematical Representation:</a:t>
-            </a:r>
-          </a:p>
-          <a:p>
+              <a:t>Mathematical Representation: Ŷ = β₀ + β₁X</a:t>
+            </a:r>
+          </a:p>
+          <a:p>
+            <a:pPr marL="284163" indent="0">
+              <a:buNone/>
+            </a:pPr>
             <a:r>
               <a:rPr lang="en-US" sz="2400" dirty="0"/>
-              <a:t>Ŷ = β₀ + β₁X</a:t>
-            </a:r>
-          </a:p>
-          <a:p>
-            <a:r>
-              <a:rPr lang="en-US" sz="2400" dirty="0"/>
-              <a:t>Where Ŷ is the predicted value.</a:t>
+              <a:t>Where Ŷ (pronounced Y Hat) is the predicted value.</a:t>
             </a:r>
           </a:p>
         </p:txBody>
@@ -9055,7 +9274,7 @@
         </p:blipFill>
         <p:spPr bwMode="auto">
           <a:xfrm>
-            <a:off x="7309022" y="1545731"/>
+            <a:off x="7309022" y="1633491"/>
             <a:ext cx="4335878" cy="4324865"/>
           </a:xfrm>
           <a:prstGeom prst="rect">
@@ -9382,15 +9601,6 @@
 </file>
 
 <file path=customXml/item1.xml><?xml version="1.0" encoding="utf-8"?>
-<?mso-contentType ?>
-<FormTemplates xmlns="http://schemas.microsoft.com/sharepoint/v3/contenttype/forms">
-  <Display>DocumentLibraryForm</Display>
-  <Edit>DocumentLibraryForm</Edit>
-  <New>DocumentLibraryForm</New>
-</FormTemplates>
-</file>
-
-<file path=customXml/item2.xml><?xml version="1.0" encoding="utf-8"?>
 <ct:contentTypeSchema xmlns:ct="http://schemas.microsoft.com/office/2006/metadata/contentType" xmlns:ma="http://schemas.microsoft.com/office/2006/metadata/properties/metaAttributes" ct:_="" ma:_="" ma:contentTypeName="Document" ma:contentTypeID="0x010100D30DB0B4DCD4994BA0B53B90F48248FB" ma:contentTypeVersion="17" ma:contentTypeDescription="Create a new document." ma:contentTypeScope="" ma:versionID="89b596077de0219f935a6ab711f2d0ee">
   <xsd:schema xmlns:xsd="http://www.w3.org/2001/XMLSchema" xmlns:xs="http://www.w3.org/2001/XMLSchema" xmlns:p="http://schemas.microsoft.com/office/2006/metadata/properties" xmlns:ns3="5d9e8ea6-d7cf-4c00-b931-0c0027af1451" xmlns:ns4="24b8453d-154c-4c63-97d1-80f7846f6991" targetNamespace="http://schemas.microsoft.com/office/2006/metadata/properties" ma:root="true" ma:fieldsID="cd616adf96839ca32a36dfb6e4534def" ns3:_="" ns4:_="">
     <xsd:import namespace="5d9e8ea6-d7cf-4c00-b931-0c0027af1451"/>
@@ -9637,6 +9847,15 @@
 </ct:contentTypeSchema>
 </file>
 
+<file path=customXml/item2.xml><?xml version="1.0" encoding="utf-8"?>
+<?mso-contentType ?>
+<FormTemplates xmlns="http://schemas.microsoft.com/sharepoint/v3/contenttype/forms">
+  <Display>DocumentLibraryForm</Display>
+  <Edit>DocumentLibraryForm</Edit>
+  <New>DocumentLibraryForm</New>
+</FormTemplates>
+</file>
+
 <file path=customXml/item3.xml><?xml version="1.0" encoding="utf-8"?>
 <p:properties xmlns:p="http://schemas.microsoft.com/office/2006/metadata/properties" xmlns:xsi="http://www.w3.org/2001/XMLSchema-instance" xmlns:pc="http://schemas.microsoft.com/office/infopath/2007/PartnerControls">
   <documentManagement>
@@ -9646,14 +9865,6 @@
 </file>
 
 <file path=customXml/itemProps1.xml><?xml version="1.0" encoding="utf-8"?>
-<ds:datastoreItem xmlns:ds="http://schemas.openxmlformats.org/officeDocument/2006/customXml" ds:itemID="{45A00539-F935-4DAE-994B-29A86868AB4E}">
-  <ds:schemaRefs>
-    <ds:schemaRef ds:uri="http://schemas.microsoft.com/sharepoint/v3/contenttype/forms"/>
-  </ds:schemaRefs>
-</ds:datastoreItem>
-</file>
-
-<file path=customXml/itemProps2.xml><?xml version="1.0" encoding="utf-8"?>
 <ds:datastoreItem xmlns:ds="http://schemas.openxmlformats.org/officeDocument/2006/customXml" ds:itemID="{E49744A2-A4E7-4F10-8EA8-A7278CF8AA73}">
   <ds:schemaRefs>
     <ds:schemaRef ds:uri="http://schemas.microsoft.com/office/2006/metadata/contentType"/>
@@ -9668,6 +9879,14 @@
     <ds:schemaRef ds:uri="http://purl.org/dc/elements/1.1/"/>
     <ds:schemaRef ds:uri="http://purl.org/dc/terms/"/>
     <ds:schemaRef ds:uri="http://schemas.microsoft.com/internal/obd"/>
+  </ds:schemaRefs>
+</ds:datastoreItem>
+</file>
+
+<file path=customXml/itemProps2.xml><?xml version="1.0" encoding="utf-8"?>
+<ds:datastoreItem xmlns:ds="http://schemas.openxmlformats.org/officeDocument/2006/customXml" ds:itemID="{45A00539-F935-4DAE-994B-29A86868AB4E}">
+  <ds:schemaRefs>
+    <ds:schemaRef ds:uri="http://schemas.microsoft.com/sharepoint/v3/contenttype/forms"/>
   </ds:schemaRefs>
 </ds:datastoreItem>
 </file>
